--- a/report/poster_en/pynq_multiband_audio_poster_v2.pptx
+++ b/report/poster_en/pynq_multiband_audio_poster_v2.pptx
@@ -2297,7 +2297,7 @@
                 <a:ea typeface="Arial"/>
                 <a:cs typeface="Arial"/>
               </a:rPr>
-              <a:t>Block-by-block board path. PL 4.507 µs/sample vs ARM scipy C 6.116 µs (1.4×; Q1.15 vs float64; no NEON).</a:t>
+              <a:t>Block-by-block board path. PL 0.317 µs/sample vs ARM scipy C 6.199 µs (19.5×; Q1.15 vs float64; no NEON).</a:t>
             </a:r>
           </a:p>
           <a:p xmlns:a="http://schemas.openxmlformats.org/drawingml/2006/main">

--- a/report/poster_en/pynq_multiband_audio_poster_v2.pptx
+++ b/report/poster_en/pynq_multiband_audio_poster_v2.pptx
@@ -442,7 +442,7 @@
           <a:lstStyle xmlns:a="http://schemas.openxmlformats.org/drawingml/2006/main"/>
           <a:p xmlns:a="http://schemas.openxmlformats.org/drawingml/2006/main">
             <a:r>
-              <a:t>Sources: src/python/band_design.py; data/results/baseline_metrics.md (local Python run, 2026-10-01); data/results/impl_metrics.md (193-tap HLS out-of-context implementation); data/results/accel_cpu_vs_fpga.md and data/results/fir_audio_loop_run_20261001.txt (board results). The 449-cycle and resource chart figures are core-only out-of-context results. The core is also integrated in the board audio overlay; board throughput is 4.507 µs/sample versus 6.116 µs/sample for ARM scipy (Q1.15 vs float64, and not a maximum CPU comparison). Bypass passed on 144,000 captured samples, but the capture was nearly silent, so an audible microphone A/B demo remains pending. The current audio path processes blocks rather than a continuous live stream. Toolchain: PYNQ 2.7.0, Vivado/Vitis HLS 2020.2. The 2.00 ms value is FIR group delay only.</a:t>
+              <a:t>Sources: src/python/band_design.py; data/results/baseline_metrics.md (local Python run, 2026-10-01); data/results/impl_metrics.md (193-tap HLS out-of-context implementation); data/results/accel_cpu_vs_fpga.md and data/results/fir_audio_loop_run_20261001.txt (board results). The 449-cycle and resource chart figures are core-only out-of-context results. The core is also integrated in the board audio overlay; board throughput is 0.317 µs/sample for the PL core versus 6.199 µs/sample for ARM scipy (Q1.15 vs float64, a 19.5x ratio, and not a maximum CPU comparison). Bypass passed on 144,000 captured samples. Live microphone monitoring works as of 2026-10-15: a 40 s duplex run carried 4,000 blocks at 1.00x real time with a bit-exact 960,000/960,000 self-check, in-core level rms median 107 / peak 24,076, and the operator heard the processed voice. Scope: that run used 0.0 dB on all four band gains, so it demonstrates the audio path rather than the four-band effect, and about 18 blocks were dropped over the 40 s because the audio IP has no DMA. fir_audio_loop.py still produces the four comparison wav files block by block; fir_live.py runs the continuous live duplex stream. Toolchain: PYNQ 2.7.0, Vivado/Vitis HLS 2020.2. The 2.00 ms value is FIR group delay only.</a:t>
             </a:r>
           </a:p>
         </p:txBody>
@@ -2321,7 +2321,7 @@
                 <a:ea typeface="Arial"/>
                 <a:cs typeface="Arial"/>
               </a:rPr>
-              <a:t>Bypass: 144k samples, zero mismatches; capture nearly silent, so audible mic A/B pending. PYNQ 2.7.0 + Vivado/Vitis HLS 2020.2.</a:t>
+              <a:t>Bypass: 144k samples, zero mismatches. Live mic -&gt; core -&gt; headphone: 1.00x real time (40 s, bit-exact). PYNQ 2.7.0 + Vivado/Vitis HLS 2020.2.</a:t>
             </a:r>
           </a:p>
         </p:txBody>

--- a/report/poster_en/pynq_multiband_audio_poster_v2.pptx
+++ b/report/poster_en/pynq_multiband_audio_poster_v2.pptx
@@ -442,7 +442,7 @@
           <a:lstStyle xmlns:a="http://schemas.openxmlformats.org/drawingml/2006/main"/>
           <a:p xmlns:a="http://schemas.openxmlformats.org/drawingml/2006/main">
             <a:r>
-              <a:t>Sources: src/python/band_design.py; data/results/baseline_metrics.md (local Python run, 2026-10-01); data/results/impl_metrics.md (193-tap HLS out-of-context implementation); data/results/accel_cpu_vs_fpga.md and data/results/fir_audio_loop_run_20261001.txt (board results). The 449-cycle and resource chart figures are core-only out-of-context results. The core is also integrated in the board audio overlay; board throughput is 0.317 µs/sample for the PL core versus 6.199 µs/sample for ARM scipy (Q1.15 vs float64, a 19.5x ratio, and not a maximum CPU comparison). Bypass passed on 144,000 captured samples. Live microphone monitoring works as of 2026-10-15: a 40 s duplex run carried 4,000 blocks at 1.00x real time with a bit-exact 960,000/960,000 self-check, in-core level rms median 107 / peak 24,076, and the operator heard the processed voice. Scope: that run used 0.0 dB on all four band gains, so it demonstrates the audio path rather than the four-band effect, and about 18 blocks were dropped over the 40 s because the audio IP has no DMA. fir_audio_loop.py still produces the four comparison wav files block by block; fir_live.py runs the continuous live duplex stream. Toolchain: PYNQ 2.7.0, Vivado/Vitis HLS 2020.2. The 2.00 ms value is FIR group delay only.</a:t>
+              <a:t>Sources: src/python/band_design.py; data/results/baseline_metrics.md (local Python run, 2026-10-01); data/results/impl_metrics.md (193-tap HLS out-of-context implementation); data/results/accel_cpu_vs_fpga.md and data/results/fir_audio_loop_run_20261001.txt (board results). The 449-cycle and resource chart figures are core-only out-of-context results. The core is also integrated in the board audio overlay; board throughput is 0.317 µs/sample for the PL core versus 6.199 µs/sample for ARM scipy (Q1.15 vs float64, a 19.5x ratio, and not a maximum CPU comparison). Bypass passed on 144,000 captured samples. Live microphone monitoring works as of 2026-10-15: a 40 s duplex run carried 4,000 blocks at 1.00x real time with a bit-exact 960,000/960,000 self-check, in-core level rms median 107 / peak 24,076, and the operator heard the processed voice. Scope: that run used 0.0 dB on all four band gains, so it demonstrates the audio path rather than the four-band effect, and about 18 blocks were dropped over the 40 s because the audio IP has no DMA. The four-band effect itself was demonstrated in a second 2026-10-15 run: six live writes to the band gains inside one continuous 66 s stream, one band alternating 0.0 dB and -41.9 dB, all applied, self-check still bit-exact 960,000/960,000 across eight gain changes, 1.00x, operator heard several distinct changes (data/results/fir_gain_ab_run_20261015.txt). A symmetric +6/0/0/-6 setting was tried first and was inaudible because total loudness barely changed. fir_audio_loop.py still produces the four comparison wav files block by block; fir_live.py runs the continuous live duplex stream. Toolchain: PYNQ 2.7.0, Vivado/Vitis HLS 2020.2. The 2.00 ms value is FIR group delay only.</a:t>
             </a:r>
           </a:p>
         </p:txBody>
@@ -2321,7 +2321,7 @@
                 <a:ea typeface="Arial"/>
                 <a:cs typeface="Arial"/>
               </a:rPr>
-              <a:t>Bypass: 144k samples, zero mismatches. Live mic -&gt; core -&gt; headphone: 1.00x real time (40 s, bit-exact). PYNQ 2.7.0 + Vivado/Vitis HLS 2020.2.</a:t>
+              <a:t>Bypass: 144k samples, zero mismatches. Live mic -&gt; core -&gt; headphone: 1.00x real time (40 s, bit-exact), still bit-exact across live per-band gain changes (66 s, 6 writes; heard). PYNQ 2.7.0 + Vivado/Vitis HLS 2020.2.</a:t>
             </a:r>
           </a:p>
         </p:txBody>
